--- a/apps/resources/bundled_files/5-klass-perimetr-jana-ayant-sabak.pptx
+++ b/apps/resources/bundled_files/5-klass-perimetr-jana-ayant-sabak.pptx
@@ -5196,7 +5196,7 @@
                 </a:solidFill>
                 <a:latin typeface="PT Sans"/>
               </a:rPr>
-              <a:t>5-класс · Математика</a:t>
+              <a:t/>
             </a:r>
           </a:p>
         </p:txBody>
@@ -5688,7 +5688,7 @@
                 </a:solidFill>
                 <a:latin typeface="PT Sans"/>
               </a:rPr>
-              <a:t>5-класс ›</a:t>
+              <a:t/>
             </a:r>
           </a:p>
           <a:p>
@@ -6605,7 +6605,7 @@
                 </a:solidFill>
                 <a:latin typeface="PT Sans"/>
               </a:rPr>
-              <a:t>5-класс ›</a:t>
+              <a:t/>
             </a:r>
           </a:p>
           <a:p>
@@ -9824,7 +9824,7 @@
                 </a:solidFill>
                 <a:latin typeface="PT Sans"/>
               </a:rPr>
-              <a:t>5-класс ›</a:t>
+              <a:t/>
             </a:r>
           </a:p>
           <a:p>
@@ -13454,7 +13454,7 @@
                 </a:solidFill>
                 <a:latin typeface="PT Sans"/>
               </a:rPr>
-              <a:t>5-класс ›</a:t>
+              <a:t/>
             </a:r>
           </a:p>
           <a:p>
@@ -15037,7 +15037,7 @@
                 </a:solidFill>
                 <a:latin typeface="PT Sans"/>
               </a:rPr>
-              <a:t>5-класс ›</a:t>
+              <a:t/>
             </a:r>
           </a:p>
           <a:p>
@@ -15788,7 +15788,7 @@
                 </a:solidFill>
                 <a:latin typeface="PT Sans"/>
               </a:rPr>
-              <a:t>5-класс ›</a:t>
+              <a:t/>
             </a:r>
           </a:p>
           <a:p>
@@ -16539,7 +16539,7 @@
                 </a:solidFill>
                 <a:latin typeface="PT Sans"/>
               </a:rPr>
-              <a:t>5-класс ›</a:t>
+              <a:t/>
             </a:r>
           </a:p>
           <a:p>
@@ -18088,7 +18088,7 @@
                 </a:solidFill>
                 <a:latin typeface="PT Sans"/>
               </a:rPr>
-              <a:t>5-класс ›</a:t>
+              <a:t/>
             </a:r>
           </a:p>
           <a:p>
@@ -19172,7 +19172,7 @@
                 </a:solidFill>
                 <a:latin typeface="PT Sans"/>
               </a:rPr>
-              <a:t>5-класс ›</a:t>
+              <a:t/>
             </a:r>
           </a:p>
           <a:p>
@@ -20702,7 +20702,7 @@
                 </a:solidFill>
                 <a:latin typeface="PT Sans"/>
               </a:rPr>
-              <a:t>5-класс ›</a:t>
+              <a:t/>
             </a:r>
           </a:p>
           <a:p>
@@ -22362,7 +22362,7 @@
                 </a:solidFill>
                 <a:latin typeface="PT Sans"/>
               </a:rPr>
-              <a:t>5-класс ›</a:t>
+              <a:t/>
             </a:r>
           </a:p>
           <a:p>
@@ -23639,7 +23639,7 @@
                 </a:solidFill>
                 <a:latin typeface="PT Sans"/>
               </a:rPr>
-              <a:t>5-класс ›</a:t>
+              <a:t/>
             </a:r>
           </a:p>
           <a:p>
@@ -25067,7 +25067,7 @@
                 </a:solidFill>
                 <a:latin typeface="PT Sans"/>
               </a:rPr>
-              <a:t>5-класс ›</a:t>
+              <a:t/>
             </a:r>
           </a:p>
           <a:p>
@@ -26523,7 +26523,7 @@
                 </a:solidFill>
                 <a:latin typeface="PT Sans"/>
               </a:rPr>
-              <a:t>5-класс ›</a:t>
+              <a:t/>
             </a:r>
           </a:p>
           <a:p>
@@ -27741,7 +27741,7 @@
                 </a:solidFill>
                 <a:latin typeface="PT Sans"/>
               </a:rPr>
-              <a:t>5-класс ›</a:t>
+              <a:t/>
             </a:r>
           </a:p>
           <a:p>
@@ -28541,7 +28541,7 @@
                 </a:solidFill>
                 <a:latin typeface="PT Sans"/>
               </a:rPr>
-              <a:t>5-класс ›</a:t>
+              <a:t/>
             </a:r>
           </a:p>
           <a:p>
@@ -29382,7 +29382,7 @@
                 </a:solidFill>
                 <a:latin typeface="PT Sans"/>
               </a:rPr>
-              <a:t>5-класс ›</a:t>
+              <a:t/>
             </a:r>
           </a:p>
           <a:p>
@@ -30331,7 +30331,7 @@
                 </a:solidFill>
                 <a:latin typeface="PT Sans"/>
               </a:rPr>
-              <a:t>5-класс ›</a:t>
+              <a:t/>
             </a:r>
           </a:p>
           <a:p>
@@ -31785,7 +31785,7 @@
                 </a:solidFill>
                 <a:latin typeface="PT Sans"/>
               </a:rPr>
-              <a:t>5-класс ›</a:t>
+              <a:t/>
             </a:r>
           </a:p>
           <a:p>
@@ -32531,7 +32531,7 @@
                 </a:solidFill>
                 <a:latin typeface="PT Sans"/>
               </a:rPr>
-              <a:t>5-класс ›</a:t>
+              <a:t/>
             </a:r>
           </a:p>
           <a:p>
@@ -33339,7 +33339,7 @@
                 </a:solidFill>
                 <a:latin typeface="PT Sans"/>
               </a:rPr>
-              <a:t>5-класс ›</a:t>
+              <a:t/>
             </a:r>
           </a:p>
           <a:p>
@@ -34530,7 +34530,7 @@
                 </a:solidFill>
                 <a:latin typeface="PT Sans"/>
               </a:rPr>
-              <a:t>5-класс ›</a:t>
+              <a:t/>
             </a:r>
           </a:p>
           <a:p>
@@ -35709,7 +35709,7 @@
                 </a:solidFill>
                 <a:latin typeface="PT Sans"/>
               </a:rPr>
-              <a:t>5-класс ›</a:t>
+              <a:t/>
             </a:r>
           </a:p>
           <a:p>
@@ -35890,7 +35890,7 @@
                 </a:solidFill>
                 <a:latin typeface="PT Sans"/>
               </a:rPr>
-              <a:t>2-класс</a:t>
+              <a:t/>
             </a:r>
           </a:p>
         </p:txBody>
@@ -36070,7 +36070,7 @@
                 </a:solidFill>
                 <a:latin typeface="PT Sans"/>
               </a:rPr>
-              <a:t>3–4-класс</a:t>
+              <a:t/>
             </a:r>
           </a:p>
         </p:txBody>
@@ -36250,7 +36250,7 @@
                 </a:solidFill>
                 <a:latin typeface="PT Sans"/>
               </a:rPr>
-              <a:t>5-класс</a:t>
+              <a:t/>
             </a:r>
           </a:p>
         </p:txBody>
@@ -36486,7 +36486,7 @@
                 </a:solidFill>
                 <a:latin typeface="PT Sans"/>
               </a:rPr>
-              <a:t>6-класс</a:t>
+              <a:t/>
             </a:r>
           </a:p>
         </p:txBody>
@@ -36906,7 +36906,7 @@
                 </a:solidFill>
                 <a:latin typeface="PT Sans"/>
               </a:rPr>
-              <a:t>5-класс ›</a:t>
+              <a:t/>
             </a:r>
           </a:p>
           <a:p>
@@ -38054,7 +38054,7 @@
                 </a:solidFill>
                 <a:latin typeface="PT Sans"/>
               </a:rPr>
-              <a:t>5-класс ›</a:t>
+              <a:t/>
             </a:r>
           </a:p>
           <a:p>

--- a/apps/resources/bundled_files/5-klass-perimetr-jana-ayant-sabak.pptx
+++ b/apps/resources/bundled_files/5-klass-perimetr-jana-ayant-sabak.pptx
@@ -1582,7 +1582,7 @@
           <a:lstStyle/>
           <a:p>
             <a:r>
-              <a:t>Ой жүгүртүү маданияты (Wenxi Lee, 2.6).</a:t>
+              <a:t>Ой жүгүртүү маданияты (Wenxi Lee, 2,6).</a:t>
             </a:r>
           </a:p>
         </p:txBody>
